--- a/drawing.pptx
+++ b/drawing.pptx
@@ -4704,6 +4704,651 @@
           </a:fontRef>
         </p:style>
       </p:cxnSp>
+      <p:sp>
+        <p:nvSpPr>
+          <p:cNvPr id="2" name="타원 1">
+            <a:extLst>
+              <a:ext uri="{FF2B5EF4-FFF2-40B4-BE49-F238E27FC236}">
+                <a16:creationId xmlns:a16="http://schemas.microsoft.com/office/drawing/2014/main" id="{B1B0D5C5-D99D-0B53-E3E5-70AB335B6240}"/>
+              </a:ext>
+            </a:extLst>
+          </p:cNvPr>
+          <p:cNvSpPr/>
+          <p:nvPr/>
+        </p:nvSpPr>
+        <p:spPr>
+          <a:xfrm>
+            <a:off x="7165724" y="803165"/>
+            <a:ext cx="819370" cy="819370"/>
+          </a:xfrm>
+          <a:prstGeom prst="ellipse">
+            <a:avLst/>
+          </a:prstGeom>
+          <a:solidFill>
+            <a:srgbClr val="F9EBC7"/>
+          </a:solidFill>
+          <a:ln>
+            <a:noFill/>
+          </a:ln>
+        </p:spPr>
+        <p:style>
+          <a:lnRef idx="2">
+            <a:schemeClr val="accent1">
+              <a:shade val="15000"/>
+            </a:schemeClr>
+          </a:lnRef>
+          <a:fillRef idx="1">
+            <a:schemeClr val="accent1"/>
+          </a:fillRef>
+          <a:effectRef idx="0">
+            <a:schemeClr val="accent1"/>
+          </a:effectRef>
+          <a:fontRef idx="minor">
+            <a:schemeClr val="lt1"/>
+          </a:fontRef>
+        </p:style>
+        <p:txBody>
+          <a:bodyPr rtlCol="0" anchor="ctr"/>
+          <a:lstStyle/>
+          <a:p>
+            <a:pPr algn="ctr"/>
+            <a:endParaRPr lang="ko-KR" altLang="en-US"/>
+          </a:p>
+        </p:txBody>
+      </p:sp>
+      <p:sp>
+        <p:nvSpPr>
+          <p:cNvPr id="3" name="하트 2">
+            <a:extLst>
+              <a:ext uri="{FF2B5EF4-FFF2-40B4-BE49-F238E27FC236}">
+                <a16:creationId xmlns:a16="http://schemas.microsoft.com/office/drawing/2014/main" id="{885CF00F-6B4C-23FC-2FD0-7F3C8DC45E7A}"/>
+              </a:ext>
+            </a:extLst>
+          </p:cNvPr>
+          <p:cNvSpPr/>
+          <p:nvPr/>
+        </p:nvSpPr>
+        <p:spPr>
+          <a:xfrm rot="10800000">
+            <a:off x="7472932" y="1552574"/>
+            <a:ext cx="204953" cy="276225"/>
+          </a:xfrm>
+          <a:prstGeom prst="heart">
+            <a:avLst/>
+          </a:prstGeom>
+          <a:solidFill>
+            <a:srgbClr val="FF0000"/>
+          </a:solidFill>
+          <a:ln>
+            <a:noFill/>
+          </a:ln>
+        </p:spPr>
+        <p:style>
+          <a:lnRef idx="2">
+            <a:schemeClr val="accent1">
+              <a:shade val="15000"/>
+            </a:schemeClr>
+          </a:lnRef>
+          <a:fillRef idx="1">
+            <a:schemeClr val="accent1"/>
+          </a:fillRef>
+          <a:effectRef idx="0">
+            <a:schemeClr val="accent1"/>
+          </a:effectRef>
+          <a:fontRef idx="minor">
+            <a:schemeClr val="lt1"/>
+          </a:fontRef>
+        </p:style>
+        <p:txBody>
+          <a:bodyPr rtlCol="0" anchor="ctr"/>
+          <a:lstStyle/>
+          <a:p>
+            <a:pPr algn="ctr"/>
+            <a:endParaRPr lang="ko-KR" altLang="en-US"/>
+          </a:p>
+        </p:txBody>
+      </p:sp>
+      <p:sp>
+        <p:nvSpPr>
+          <p:cNvPr id="4" name="자유형: 도형 3">
+            <a:extLst>
+              <a:ext uri="{FF2B5EF4-FFF2-40B4-BE49-F238E27FC236}">
+                <a16:creationId xmlns:a16="http://schemas.microsoft.com/office/drawing/2014/main" id="{1AA46D49-0227-BA02-7054-EEA648D2185D}"/>
+              </a:ext>
+            </a:extLst>
+          </p:cNvPr>
+          <p:cNvSpPr/>
+          <p:nvPr/>
+        </p:nvSpPr>
+        <p:spPr>
+          <a:xfrm rot="20848436">
+            <a:off x="7380512" y="511557"/>
+            <a:ext cx="389791" cy="358289"/>
+          </a:xfrm>
+          <a:custGeom>
+            <a:avLst/>
+            <a:gdLst>
+              <a:gd name="csX0" fmla="*/ 158155 w 297598"/>
+              <a:gd name="csY0" fmla="*/ 1568 h 273547"/>
+              <a:gd name="csX1" fmla="*/ 164780 w 297598"/>
+              <a:gd name="csY1" fmla="*/ 3483 h 273547"/>
+              <a:gd name="csX2" fmla="*/ 177153 w 297598"/>
+              <a:gd name="csY2" fmla="*/ 5750 h 273547"/>
+              <a:gd name="csX3" fmla="*/ 178536 w 297598"/>
+              <a:gd name="csY3" fmla="*/ 7459 h 273547"/>
+              <a:gd name="csX4" fmla="*/ 184032 w 297598"/>
+              <a:gd name="csY4" fmla="*/ 9047 h 273547"/>
+              <a:gd name="csX5" fmla="*/ 192194 w 297598"/>
+              <a:gd name="csY5" fmla="*/ 24318 h 273547"/>
+              <a:gd name="csX6" fmla="*/ 197693 w 297598"/>
+              <a:gd name="csY6" fmla="*/ 31107 h 273547"/>
+              <a:gd name="csX7" fmla="*/ 198856 w 297598"/>
+              <a:gd name="csY7" fmla="*/ 36786 h 273547"/>
+              <a:gd name="csX8" fmla="*/ 199406 w 297598"/>
+              <a:gd name="csY8" fmla="*/ 37813 h 273547"/>
+              <a:gd name="csX9" fmla="*/ 199355 w 297598"/>
+              <a:gd name="csY9" fmla="*/ 39219 h 273547"/>
+              <a:gd name="csX10" fmla="*/ 206425 w 297598"/>
+              <a:gd name="csY10" fmla="*/ 73728 h 273547"/>
+              <a:gd name="csX11" fmla="*/ 205333 w 297598"/>
+              <a:gd name="csY11" fmla="*/ 80652 h 273547"/>
+              <a:gd name="csX12" fmla="*/ 217772 w 297598"/>
+              <a:gd name="csY12" fmla="*/ 68600 h 273547"/>
+              <a:gd name="csX13" fmla="*/ 105138 w 297598"/>
+              <a:gd name="csY13" fmla="*/ 273547 h 273547"/>
+              <a:gd name="csX14" fmla="*/ 104521 w 297598"/>
+              <a:gd name="csY14" fmla="*/ 271384 h 273547"/>
+              <a:gd name="csX15" fmla="*/ 103223 w 297598"/>
+              <a:gd name="csY15" fmla="*/ 272804 h 273547"/>
+              <a:gd name="csX16" fmla="*/ 93888 w 297598"/>
+              <a:gd name="csY16" fmla="*/ 39132 h 273547"/>
+              <a:gd name="csX17" fmla="*/ 99665 w 297598"/>
+              <a:gd name="csY17" fmla="*/ 55534 h 273547"/>
+              <a:gd name="csX18" fmla="*/ 101624 w 297598"/>
+              <a:gd name="csY18" fmla="*/ 49338 h 273547"/>
+              <a:gd name="csX19" fmla="*/ 123063 w 297598"/>
+              <a:gd name="csY19" fmla="*/ 21979 h 273547"/>
+              <a:gd name="csX20" fmla="*/ 124063 w 297598"/>
+              <a:gd name="csY20" fmla="*/ 19777 h 273547"/>
+              <a:gd name="csX21" fmla="*/ 125696 w 297598"/>
+              <a:gd name="csY21" fmla="*/ 18618 h 273547"/>
+              <a:gd name="csX22" fmla="*/ 128458 w 297598"/>
+              <a:gd name="csY22" fmla="*/ 15094 h 273547"/>
+              <a:gd name="csX23" fmla="*/ 134600 w 297598"/>
+              <a:gd name="csY23" fmla="*/ 12297 h 273547"/>
+              <a:gd name="csX24" fmla="*/ 150658 w 297598"/>
+              <a:gd name="csY24" fmla="*/ 895 h 273547"/>
+              <a:gd name="csX25" fmla="*/ 157059 w 297598"/>
+              <a:gd name="csY25" fmla="*/ 2068 h 273547"/>
+            </a:gdLst>
+            <a:ahLst/>
+            <a:cxnLst>
+              <a:cxn ang="0">
+                <a:pos x="csX0" y="csY0"/>
+              </a:cxn>
+              <a:cxn ang="0">
+                <a:pos x="csX1" y="csY1"/>
+              </a:cxn>
+              <a:cxn ang="0">
+                <a:pos x="csX2" y="csY2"/>
+              </a:cxn>
+              <a:cxn ang="0">
+                <a:pos x="csX3" y="csY3"/>
+              </a:cxn>
+              <a:cxn ang="0">
+                <a:pos x="csX4" y="csY4"/>
+              </a:cxn>
+              <a:cxn ang="0">
+                <a:pos x="csX5" y="csY5"/>
+              </a:cxn>
+              <a:cxn ang="0">
+                <a:pos x="csX6" y="csY6"/>
+              </a:cxn>
+              <a:cxn ang="0">
+                <a:pos x="csX7" y="csY7"/>
+              </a:cxn>
+              <a:cxn ang="0">
+                <a:pos x="csX8" y="csY8"/>
+              </a:cxn>
+              <a:cxn ang="0">
+                <a:pos x="csX9" y="csY9"/>
+              </a:cxn>
+              <a:cxn ang="0">
+                <a:pos x="csX10" y="csY10"/>
+              </a:cxn>
+              <a:cxn ang="0">
+                <a:pos x="csX11" y="csY11"/>
+              </a:cxn>
+              <a:cxn ang="0">
+                <a:pos x="csX12" y="csY12"/>
+              </a:cxn>
+              <a:cxn ang="0">
+                <a:pos x="csX13" y="csY13"/>
+              </a:cxn>
+              <a:cxn ang="0">
+                <a:pos x="csX14" y="csY14"/>
+              </a:cxn>
+              <a:cxn ang="0">
+                <a:pos x="csX15" y="csY15"/>
+              </a:cxn>
+              <a:cxn ang="0">
+                <a:pos x="csX16" y="csY16"/>
+              </a:cxn>
+              <a:cxn ang="0">
+                <a:pos x="csX17" y="csY17"/>
+              </a:cxn>
+              <a:cxn ang="0">
+                <a:pos x="csX18" y="csY18"/>
+              </a:cxn>
+              <a:cxn ang="0">
+                <a:pos x="csX19" y="csY19"/>
+              </a:cxn>
+              <a:cxn ang="0">
+                <a:pos x="csX20" y="csY20"/>
+              </a:cxn>
+              <a:cxn ang="0">
+                <a:pos x="csX21" y="csY21"/>
+              </a:cxn>
+              <a:cxn ang="0">
+                <a:pos x="csX22" y="csY22"/>
+              </a:cxn>
+              <a:cxn ang="0">
+                <a:pos x="csX23" y="csY23"/>
+              </a:cxn>
+              <a:cxn ang="0">
+                <a:pos x="csX24" y="csY24"/>
+              </a:cxn>
+              <a:cxn ang="0">
+                <a:pos x="csX25" y="csY25"/>
+              </a:cxn>
+            </a:cxnLst>
+            <a:rect l="l" t="t" r="r" b="b"/>
+            <a:pathLst>
+              <a:path w="297598" h="273547">
+                <a:moveTo>
+                  <a:pt x="158155" y="1568"/>
+                </a:moveTo>
+                <a:lnTo>
+                  <a:pt x="164780" y="3483"/>
+                </a:lnTo>
+                <a:lnTo>
+                  <a:pt x="177153" y="5750"/>
+                </a:lnTo>
+                <a:lnTo>
+                  <a:pt x="178536" y="7459"/>
+                </a:lnTo>
+                <a:lnTo>
+                  <a:pt x="184032" y="9047"/>
+                </a:lnTo>
+                <a:lnTo>
+                  <a:pt x="192194" y="24318"/>
+                </a:lnTo>
+                <a:lnTo>
+                  <a:pt x="197693" y="31107"/>
+                </a:lnTo>
+                <a:lnTo>
+                  <a:pt x="198856" y="36786"/>
+                </a:lnTo>
+                <a:lnTo>
+                  <a:pt x="199406" y="37813"/>
+                </a:lnTo>
+                <a:lnTo>
+                  <a:pt x="199355" y="39219"/>
+                </a:lnTo>
+                <a:lnTo>
+                  <a:pt x="206425" y="73728"/>
+                </a:lnTo>
+                <a:lnTo>
+                  <a:pt x="205333" y="80652"/>
+                </a:lnTo>
+                <a:lnTo>
+                  <a:pt x="217772" y="68600"/>
+                </a:lnTo>
+                <a:cubicBezTo>
+                  <a:pt x="315955" y="-10170"/>
+                  <a:pt x="367344" y="187273"/>
+                  <a:pt x="105138" y="273547"/>
+                </a:cubicBezTo>
+                <a:lnTo>
+                  <a:pt x="104521" y="271384"/>
+                </a:lnTo>
+                <a:lnTo>
+                  <a:pt x="103223" y="272804"/>
+                </a:lnTo>
+                <a:cubicBezTo>
+                  <a:pt x="-92923" y="78583"/>
+                  <a:pt x="41177" y="-75175"/>
+                  <a:pt x="93888" y="39132"/>
+                </a:cubicBezTo>
+                <a:lnTo>
+                  <a:pt x="99665" y="55534"/>
+                </a:lnTo>
+                <a:lnTo>
+                  <a:pt x="101624" y="49338"/>
+                </a:lnTo>
+                <a:lnTo>
+                  <a:pt x="123063" y="21979"/>
+                </a:lnTo>
+                <a:lnTo>
+                  <a:pt x="124063" y="19777"/>
+                </a:lnTo>
+                <a:lnTo>
+                  <a:pt x="125696" y="18618"/>
+                </a:lnTo>
+                <a:lnTo>
+                  <a:pt x="128458" y="15094"/>
+                </a:lnTo>
+                <a:lnTo>
+                  <a:pt x="134600" y="12297"/>
+                </a:lnTo>
+                <a:lnTo>
+                  <a:pt x="150658" y="895"/>
+                </a:lnTo>
+                <a:lnTo>
+                  <a:pt x="157059" y="2068"/>
+                </a:lnTo>
+                <a:close/>
+              </a:path>
+            </a:pathLst>
+          </a:custGeom>
+          <a:solidFill>
+            <a:srgbClr val="FF0000"/>
+          </a:solidFill>
+          <a:ln>
+            <a:noFill/>
+          </a:ln>
+        </p:spPr>
+        <p:style>
+          <a:lnRef idx="2">
+            <a:schemeClr val="accent1">
+              <a:shade val="15000"/>
+            </a:schemeClr>
+          </a:lnRef>
+          <a:fillRef idx="1">
+            <a:schemeClr val="accent1"/>
+          </a:fillRef>
+          <a:effectRef idx="0">
+            <a:schemeClr val="accent1"/>
+          </a:effectRef>
+          <a:fontRef idx="minor">
+            <a:schemeClr val="lt1"/>
+          </a:fontRef>
+        </p:style>
+        <p:txBody>
+          <a:bodyPr wrap="square" rtlCol="0" anchor="ctr">
+            <a:noAutofit/>
+          </a:bodyPr>
+          <a:lstStyle/>
+          <a:p>
+            <a:pPr algn="ctr"/>
+            <a:endParaRPr lang="ko-KR" altLang="en-US"/>
+          </a:p>
+        </p:txBody>
+      </p:sp>
+      <p:sp>
+        <p:nvSpPr>
+          <p:cNvPr id="5" name="이등변 삼각형 4">
+            <a:extLst>
+              <a:ext uri="{FF2B5EF4-FFF2-40B4-BE49-F238E27FC236}">
+                <a16:creationId xmlns:a16="http://schemas.microsoft.com/office/drawing/2014/main" id="{FA1F23E5-87AC-8081-F7C6-DB6C759A7521}"/>
+              </a:ext>
+            </a:extLst>
+          </p:cNvPr>
+          <p:cNvSpPr/>
+          <p:nvPr/>
+        </p:nvSpPr>
+        <p:spPr>
+          <a:xfrm rot="10800000">
+            <a:off x="7480157" y="1290838"/>
+            <a:ext cx="190500" cy="228600"/>
+          </a:xfrm>
+          <a:prstGeom prst="triangle">
+            <a:avLst/>
+          </a:prstGeom>
+          <a:solidFill>
+            <a:srgbClr val="FFC000"/>
+          </a:solidFill>
+          <a:ln>
+            <a:noFill/>
+          </a:ln>
+        </p:spPr>
+        <p:style>
+          <a:lnRef idx="2">
+            <a:schemeClr val="accent1">
+              <a:shade val="15000"/>
+            </a:schemeClr>
+          </a:lnRef>
+          <a:fillRef idx="1">
+            <a:schemeClr val="accent1"/>
+          </a:fillRef>
+          <a:effectRef idx="0">
+            <a:schemeClr val="accent1"/>
+          </a:effectRef>
+          <a:fontRef idx="minor">
+            <a:schemeClr val="lt1"/>
+          </a:fontRef>
+        </p:style>
+        <p:txBody>
+          <a:bodyPr rtlCol="0" anchor="ctr"/>
+          <a:lstStyle/>
+          <a:p>
+            <a:pPr algn="ctr"/>
+            <a:endParaRPr lang="ko-KR" altLang="en-US"/>
+          </a:p>
+        </p:txBody>
+      </p:sp>
+      <p:sp>
+        <p:nvSpPr>
+          <p:cNvPr id="9" name="타원 8">
+            <a:extLst>
+              <a:ext uri="{FF2B5EF4-FFF2-40B4-BE49-F238E27FC236}">
+                <a16:creationId xmlns:a16="http://schemas.microsoft.com/office/drawing/2014/main" id="{18EEAFBE-7F29-C5B9-2F15-84D94090F63D}"/>
+              </a:ext>
+            </a:extLst>
+          </p:cNvPr>
+          <p:cNvSpPr/>
+          <p:nvPr/>
+        </p:nvSpPr>
+        <p:spPr>
+          <a:xfrm>
+            <a:off x="7270719" y="1021958"/>
+            <a:ext cx="235744" cy="235744"/>
+          </a:xfrm>
+          <a:prstGeom prst="ellipse">
+            <a:avLst/>
+          </a:prstGeom>
+          <a:solidFill>
+            <a:schemeClr val="bg1"/>
+          </a:solidFill>
+          <a:ln w="12700">
+            <a:solidFill>
+              <a:schemeClr val="tx1"/>
+            </a:solidFill>
+          </a:ln>
+        </p:spPr>
+        <p:style>
+          <a:lnRef idx="2">
+            <a:schemeClr val="accent1">
+              <a:shade val="15000"/>
+            </a:schemeClr>
+          </a:lnRef>
+          <a:fillRef idx="1">
+            <a:schemeClr val="accent1"/>
+          </a:fillRef>
+          <a:effectRef idx="0">
+            <a:schemeClr val="accent1"/>
+          </a:effectRef>
+          <a:fontRef idx="minor">
+            <a:schemeClr val="lt1"/>
+          </a:fontRef>
+        </p:style>
+        <p:txBody>
+          <a:bodyPr rtlCol="0" anchor="ctr"/>
+          <a:lstStyle/>
+          <a:p>
+            <a:pPr algn="ctr"/>
+            <a:endParaRPr lang="ko-KR" altLang="en-US"/>
+          </a:p>
+        </p:txBody>
+      </p:sp>
+      <p:sp>
+        <p:nvSpPr>
+          <p:cNvPr id="11" name="타원 10">
+            <a:extLst>
+              <a:ext uri="{FF2B5EF4-FFF2-40B4-BE49-F238E27FC236}">
+                <a16:creationId xmlns:a16="http://schemas.microsoft.com/office/drawing/2014/main" id="{920457B1-475E-45EE-222B-48E1603EFC86}"/>
+              </a:ext>
+            </a:extLst>
+          </p:cNvPr>
+          <p:cNvSpPr/>
+          <p:nvPr/>
+        </p:nvSpPr>
+        <p:spPr>
+          <a:xfrm>
+            <a:off x="7373753" y="1042634"/>
+            <a:ext cx="104687" cy="104687"/>
+          </a:xfrm>
+          <a:prstGeom prst="ellipse">
+            <a:avLst/>
+          </a:prstGeom>
+          <a:solidFill>
+            <a:schemeClr val="tx1"/>
+          </a:solidFill>
+          <a:ln>
+            <a:noFill/>
+          </a:ln>
+        </p:spPr>
+        <p:style>
+          <a:lnRef idx="2">
+            <a:schemeClr val="accent1">
+              <a:shade val="15000"/>
+            </a:schemeClr>
+          </a:lnRef>
+          <a:fillRef idx="1">
+            <a:schemeClr val="accent1"/>
+          </a:fillRef>
+          <a:effectRef idx="0">
+            <a:schemeClr val="accent1"/>
+          </a:effectRef>
+          <a:fontRef idx="minor">
+            <a:schemeClr val="lt1"/>
+          </a:fontRef>
+        </p:style>
+        <p:txBody>
+          <a:bodyPr rtlCol="0" anchor="ctr"/>
+          <a:lstStyle/>
+          <a:p>
+            <a:pPr algn="ctr"/>
+            <a:endParaRPr lang="ko-KR" altLang="en-US"/>
+          </a:p>
+        </p:txBody>
+      </p:sp>
+      <p:sp>
+        <p:nvSpPr>
+          <p:cNvPr id="12" name="타원 11">
+            <a:extLst>
+              <a:ext uri="{FF2B5EF4-FFF2-40B4-BE49-F238E27FC236}">
+                <a16:creationId xmlns:a16="http://schemas.microsoft.com/office/drawing/2014/main" id="{87CC2EF6-67D0-3E0E-3199-C62F119B8A6B}"/>
+              </a:ext>
+            </a:extLst>
+          </p:cNvPr>
+          <p:cNvSpPr/>
+          <p:nvPr/>
+        </p:nvSpPr>
+        <p:spPr>
+          <a:xfrm>
+            <a:off x="7617532" y="1021958"/>
+            <a:ext cx="235744" cy="235744"/>
+          </a:xfrm>
+          <a:prstGeom prst="ellipse">
+            <a:avLst/>
+          </a:prstGeom>
+          <a:solidFill>
+            <a:schemeClr val="bg1"/>
+          </a:solidFill>
+          <a:ln w="12700">
+            <a:solidFill>
+              <a:schemeClr val="tx1"/>
+            </a:solidFill>
+          </a:ln>
+        </p:spPr>
+        <p:style>
+          <a:lnRef idx="2">
+            <a:schemeClr val="accent1">
+              <a:shade val="15000"/>
+            </a:schemeClr>
+          </a:lnRef>
+          <a:fillRef idx="1">
+            <a:schemeClr val="accent1"/>
+          </a:fillRef>
+          <a:effectRef idx="0">
+            <a:schemeClr val="accent1"/>
+          </a:effectRef>
+          <a:fontRef idx="minor">
+            <a:schemeClr val="lt1"/>
+          </a:fontRef>
+        </p:style>
+        <p:txBody>
+          <a:bodyPr rtlCol="0" anchor="ctr"/>
+          <a:lstStyle/>
+          <a:p>
+            <a:pPr algn="ctr"/>
+            <a:endParaRPr lang="ko-KR" altLang="en-US"/>
+          </a:p>
+        </p:txBody>
+      </p:sp>
+      <p:sp>
+        <p:nvSpPr>
+          <p:cNvPr id="13" name="타원 12">
+            <a:extLst>
+              <a:ext uri="{FF2B5EF4-FFF2-40B4-BE49-F238E27FC236}">
+                <a16:creationId xmlns:a16="http://schemas.microsoft.com/office/drawing/2014/main" id="{AA5BA9FD-06B3-91BE-3FA6-B39D159DD569}"/>
+              </a:ext>
+            </a:extLst>
+          </p:cNvPr>
+          <p:cNvSpPr/>
+          <p:nvPr/>
+        </p:nvSpPr>
+        <p:spPr>
+          <a:xfrm>
+            <a:off x="7720566" y="1042634"/>
+            <a:ext cx="104687" cy="104687"/>
+          </a:xfrm>
+          <a:prstGeom prst="ellipse">
+            <a:avLst/>
+          </a:prstGeom>
+          <a:solidFill>
+            <a:schemeClr val="tx1"/>
+          </a:solidFill>
+          <a:ln>
+            <a:noFill/>
+          </a:ln>
+        </p:spPr>
+        <p:style>
+          <a:lnRef idx="2">
+            <a:schemeClr val="accent1">
+              <a:shade val="15000"/>
+            </a:schemeClr>
+          </a:lnRef>
+          <a:fillRef idx="1">
+            <a:schemeClr val="accent1"/>
+          </a:fillRef>
+          <a:effectRef idx="0">
+            <a:schemeClr val="accent1"/>
+          </a:effectRef>
+          <a:fontRef idx="minor">
+            <a:schemeClr val="lt1"/>
+          </a:fontRef>
+        </p:style>
+        <p:txBody>
+          <a:bodyPr rtlCol="0" anchor="ctr"/>
+          <a:lstStyle/>
+          <a:p>
+            <a:pPr algn="ctr"/>
+            <a:endParaRPr lang="ko-KR" altLang="en-US"/>
+          </a:p>
+        </p:txBody>
+      </p:sp>
     </p:spTree>
     <p:extLst>
       <p:ext uri="{BB962C8B-B14F-4D97-AF65-F5344CB8AC3E}">

--- a/drawing.pptx
+++ b/drawing.pptx
@@ -3351,8 +3351,8 @@
         </p:nvSpPr>
         <p:spPr>
           <a:xfrm>
-            <a:off x="1830388" y="1265193"/>
-            <a:ext cx="2280746" cy="4159689"/>
+            <a:off x="1830388" y="1265194"/>
+            <a:ext cx="2280746" cy="2898016"/>
           </a:xfrm>
           <a:custGeom>
             <a:avLst/>
